--- a/Car_Data_Analysis.pptx
+++ b/Car_Data_Analysis.pptx
@@ -259,7 +259,7 @@
           <a:p>
             <a:fld id="{EF1077DB-935E-4A0A-947A-D283B9F9F452}" type="datetimeFigureOut">
               <a:rPr lang="en-US" smtClean="0"/>
-              <a:t>8/30/2026</a:t>
+              <a:t>8/31/2026</a:t>
             </a:fld>
             <a:endParaRPr lang="en-US" dirty="0"/>
           </a:p>
@@ -436,7 +436,7 @@
           <a:p>
             <a:fld id="{2D9EC30E-1A71-4188-9BE7-E2A64929A436}" type="datetimeFigureOut">
               <a:rPr lang="en-US" noProof="0" smtClean="0"/>
-              <a:t>8/30/2026</a:t>
+              <a:t>8/31/2026</a:t>
             </a:fld>
             <a:endParaRPr lang="en-US" noProof="0" dirty="0"/>
           </a:p>
@@ -1533,7 +1533,7 @@
             <a:fld id="{B61BEF0D-F0BB-DE4B-95CE-6DB70DBA9567}" type="datetimeFigureOut">
               <a:rPr lang="en-US" smtClean="0"/>
               <a:pPr/>
-              <a:t>8/30/2026</a:t>
+              <a:t>8/31/2026</a:t>
             </a:fld>
             <a:endParaRPr lang="en-US" dirty="0"/>
           </a:p>
@@ -1787,7 +1787,7 @@
             <a:fld id="{B61BEF0D-F0BB-DE4B-95CE-6DB70DBA9567}" type="datetimeFigureOut">
               <a:rPr lang="en-US" smtClean="0"/>
               <a:pPr/>
-              <a:t>8/30/2026</a:t>
+              <a:t>8/31/2026</a:t>
             </a:fld>
             <a:endParaRPr lang="en-US" dirty="0"/>
           </a:p>
@@ -2104,7 +2104,7 @@
             <a:fld id="{B61BEF0D-F0BB-DE4B-95CE-6DB70DBA9567}" type="datetimeFigureOut">
               <a:rPr lang="en-US" smtClean="0"/>
               <a:pPr/>
-              <a:t>8/30/2026</a:t>
+              <a:t>8/31/2026</a:t>
             </a:fld>
             <a:endParaRPr lang="en-US" dirty="0"/>
           </a:p>
@@ -2440,7 +2440,7 @@
             <a:fld id="{B61BEF0D-F0BB-DE4B-95CE-6DB70DBA9567}" type="datetimeFigureOut">
               <a:rPr lang="en-US" smtClean="0"/>
               <a:pPr/>
-              <a:t>8/30/2026</a:t>
+              <a:t>8/31/2026</a:t>
             </a:fld>
             <a:endParaRPr lang="en-US" dirty="0"/>
           </a:p>
@@ -2757,7 +2757,7 @@
             <a:fld id="{B61BEF0D-F0BB-DE4B-95CE-6DB70DBA9567}" type="datetimeFigureOut">
               <a:rPr lang="en-US" smtClean="0"/>
               <a:pPr/>
-              <a:t>8/30/2026</a:t>
+              <a:t>8/31/2026</a:t>
             </a:fld>
             <a:endParaRPr lang="en-US" dirty="0"/>
           </a:p>
@@ -3153,7 +3153,7 @@
             <a:fld id="{B61BEF0D-F0BB-DE4B-95CE-6DB70DBA9567}" type="datetimeFigureOut">
               <a:rPr lang="en-US" smtClean="0"/>
               <a:pPr/>
-              <a:t>8/30/2026</a:t>
+              <a:t>8/31/2026</a:t>
             </a:fld>
             <a:endParaRPr lang="en-US" dirty="0"/>
           </a:p>
@@ -3325,7 +3325,7 @@
           <a:p>
             <a:fld id="{55C6B4A9-1611-4792-9094-5F34BCA07E0B}" type="datetimeFigureOut">
               <a:rPr lang="en-US" smtClean="0"/>
-              <a:t>8/30/2026</a:t>
+              <a:t>8/31/2026</a:t>
             </a:fld>
             <a:endParaRPr lang="en-US" dirty="0"/>
           </a:p>
@@ -3507,7 +3507,7 @@
             <a:fld id="{B61BEF0D-F0BB-DE4B-95CE-6DB70DBA9567}" type="datetimeFigureOut">
               <a:rPr lang="en-US" smtClean="0"/>
               <a:pPr/>
-              <a:t>8/30/2026</a:t>
+              <a:t>8/31/2026</a:t>
             </a:fld>
             <a:endParaRPr lang="en-US" dirty="0"/>
           </a:p>
@@ -5236,7 +5236,7 @@
             <a:fld id="{B61BEF0D-F0BB-DE4B-95CE-6DB70DBA9567}" type="datetimeFigureOut">
               <a:rPr lang="en-US" smtClean="0"/>
               <a:pPr/>
-              <a:t>8/30/2026</a:t>
+              <a:t>8/31/2026</a:t>
             </a:fld>
             <a:endParaRPr lang="en-US" dirty="0"/>
           </a:p>
@@ -6971,7 +6971,7 @@
             <a:fld id="{B61BEF0D-F0BB-DE4B-95CE-6DB70DBA9567}" type="datetimeFigureOut">
               <a:rPr lang="en-US" smtClean="0"/>
               <a:pPr/>
-              <a:t>8/30/2026</a:t>
+              <a:t>8/31/2026</a:t>
             </a:fld>
             <a:endParaRPr lang="en-US" dirty="0"/>
           </a:p>
@@ -7205,7 +7205,7 @@
           <a:p>
             <a:fld id="{EB712588-04B1-427B-82EE-E8DB90309F08}" type="datetimeFigureOut">
               <a:rPr lang="en-US" smtClean="0"/>
-              <a:t>8/30/2026</a:t>
+              <a:t>8/31/2026</a:t>
             </a:fld>
             <a:endParaRPr lang="en-US" dirty="0"/>
           </a:p>
@@ -7581,7 +7581,7 @@
             <a:fld id="{B61BEF0D-F0BB-DE4B-95CE-6DB70DBA9567}" type="datetimeFigureOut">
               <a:rPr lang="en-US" smtClean="0"/>
               <a:pPr/>
-              <a:t>8/30/2026</a:t>
+              <a:t>8/31/2026</a:t>
             </a:fld>
             <a:endParaRPr lang="en-US" dirty="0"/>
           </a:p>
@@ -7707,7 +7707,7 @@
             <a:fld id="{B61BEF0D-F0BB-DE4B-95CE-6DB70DBA9567}" type="datetimeFigureOut">
               <a:rPr lang="en-US" smtClean="0"/>
               <a:pPr/>
-              <a:t>8/30/2026</a:t>
+              <a:t>8/31/2026</a:t>
             </a:fld>
             <a:endParaRPr lang="en-US" dirty="0"/>
           </a:p>
@@ -7805,7 +7805,7 @@
             <a:fld id="{B61BEF0D-F0BB-DE4B-95CE-6DB70DBA9567}" type="datetimeFigureOut">
               <a:rPr lang="en-US" smtClean="0"/>
               <a:pPr/>
-              <a:t>8/30/2026</a:t>
+              <a:t>8/31/2026</a:t>
             </a:fld>
             <a:endParaRPr lang="en-US" dirty="0"/>
           </a:p>
@@ -8062,7 +8062,7 @@
           <a:p>
             <a:fld id="{42A54C80-263E-416B-A8E0-580EDEADCBDC}" type="datetimeFigureOut">
               <a:rPr lang="en-US" smtClean="0"/>
-              <a:t>8/30/2026</a:t>
+              <a:t>8/31/2026</a:t>
             </a:fld>
             <a:endParaRPr lang="en-US" dirty="0"/>
           </a:p>
@@ -8370,7 +8370,7 @@
             <a:fld id="{B61BEF0D-F0BB-DE4B-95CE-6DB70DBA9567}" type="datetimeFigureOut">
               <a:rPr lang="en-US" smtClean="0"/>
               <a:pPr/>
-              <a:t>8/30/2026</a:t>
+              <a:t>8/31/2026</a:t>
             </a:fld>
             <a:endParaRPr lang="en-US" dirty="0"/>
           </a:p>
@@ -9074,7 +9074,7 @@
             <a:fld id="{B61BEF0D-F0BB-DE4B-95CE-6DB70DBA9567}" type="datetimeFigureOut">
               <a:rPr lang="en-US" smtClean="0"/>
               <a:pPr/>
-              <a:t>8/30/2026</a:t>
+              <a:t>8/31/2026</a:t>
             </a:fld>
             <a:endParaRPr lang="en-US" dirty="0"/>
           </a:p>
@@ -9285,7 +9285,7 @@
                 </a:solidFill>
               </a:rPr>
               <a:pPr/>
-              <a:t>8/30/2026</a:t>
+              <a:t>8/31/2026</a:t>
             </a:fld>
             <a:endParaRPr lang="en-US" sz="1100" dirty="0">
               <a:solidFill>
@@ -14811,11 +14811,27 @@
             <a:r>
               <a:rPr lang="en-IN" b="0" u="sng" dirty="0">
                 <a:solidFill>
-                  <a:srgbClr val="0070C0"/>
-                </a:solidFill>
+                  <a:schemeClr val="accent1">
+                    <a:lumMod val="75000"/>
+                  </a:schemeClr>
+                </a:solidFill>
+                <a:hlinkClick r:id="rId2">
+                  <a:extLst>
+                    <a:ext uri="{A12FA001-AC4F-418D-AE19-62706E023703}">
+                      <ahyp:hlinkClr xmlns:ahyp="http://schemas.microsoft.com/office/drawing/2018/hyperlinkcolor" val="tx"/>
+                    </a:ext>
+                  </a:extLst>
+                </a:hlinkClick>
               </a:rPr>
               <a:t>https://github.com/paramsinghania782-coder/Car-Data-Analysis.git</a:t>
             </a:r>
+            <a:endParaRPr lang="en-IN" b="0" u="sng" dirty="0">
+              <a:solidFill>
+                <a:schemeClr val="accent1">
+                  <a:lumMod val="75000"/>
+                </a:schemeClr>
+              </a:solidFill>
+            </a:endParaRPr>
           </a:p>
         </p:txBody>
       </p:sp>
@@ -14834,7 +14850,7 @@
           <p:nvPr/>
         </p:nvPicPr>
         <p:blipFill>
-          <a:blip r:embed="rId2"/>
+          <a:blip r:embed="rId3"/>
           <a:stretch>
             <a:fillRect/>
           </a:stretch>
@@ -14944,38 +14960,6 @@
           <a:p>
             <a:pPr algn="ctr"/>
             <a:endParaRPr lang="en-IN"/>
-          </a:p>
-        </p:txBody>
-      </p:sp>
-      <p:sp>
-        <p:nvSpPr>
-          <p:cNvPr id="7" name="TextBox 6">
-            <a:extLst>
-              <a:ext uri="{FF2B5EF4-FFF2-40B4-BE49-F238E27FC236}">
-                <a16:creationId xmlns:a16="http://schemas.microsoft.com/office/drawing/2014/main" id="{59ECA156-01FC-7CF8-2B37-83CC69897F2B}"/>
-              </a:ext>
-            </a:extLst>
-          </p:cNvPr>
-          <p:cNvSpPr txBox="1"/>
-          <p:nvPr/>
-        </p:nvSpPr>
-        <p:spPr>
-          <a:xfrm>
-            <a:off x="4897120" y="5862320"/>
-            <a:ext cx="184731" cy="369332"/>
-          </a:xfrm>
-          <a:prstGeom prst="rect">
-            <a:avLst/>
-          </a:prstGeom>
-          <a:noFill/>
-        </p:spPr>
-        <p:txBody>
-          <a:bodyPr wrap="none" rtlCol="0">
-            <a:spAutoFit/>
-          </a:bodyPr>
-          <a:lstStyle/>
-          <a:p>
-            <a:endParaRPr lang="en-IN" dirty="0"/>
           </a:p>
         </p:txBody>
       </p:sp>
@@ -16527,6 +16511,24 @@
 </file>
 
 <file path=customXml/item1.xml><?xml version="1.0" encoding="utf-8"?>
+<?mso-contentType ?>
+<FormTemplates xmlns="http://schemas.microsoft.com/sharepoint/v3/contenttype/forms">
+  <Display>DocumentLibraryForm</Display>
+  <Edit>DocumentLibraryForm</Edit>
+  <New>DocumentLibraryForm</New>
+</FormTemplates>
+</file>
+
+<file path=customXml/item2.xml><?xml version="1.0" encoding="utf-8"?>
+<p:properties xmlns:p="http://schemas.microsoft.com/office/2006/metadata/properties" xmlns:xsi="http://www.w3.org/2001/XMLSchema-instance" xmlns:pc="http://schemas.microsoft.com/office/infopath/2007/PartnerControls">
+  <documentManagement>
+    <Status xmlns="71af3243-3dd4-4a8d-8c0d-dd76da1f02a5">Not started</Status>
+    <MediaServiceKeyPoints xmlns="71af3243-3dd4-4a8d-8c0d-dd76da1f02a5" xsi:nil="true"/>
+  </documentManagement>
+</p:properties>
+</file>
+
+<file path=customXml/item3.xml><?xml version="1.0" encoding="utf-8"?>
 <ct:contentTypeSchema xmlns:ct="http://schemas.microsoft.com/office/2006/metadata/contentType" xmlns:ma="http://schemas.microsoft.com/office/2006/metadata/properties/metaAttributes" ct:_="" ma:_="" ma:contentTypeName="Document" ma:contentTypeID="0x01010079F111ED35F8CC479449609E8A0923A6" ma:contentTypeVersion="12" ma:contentTypeDescription="Create a new document." ma:contentTypeScope="" ma:versionID="426e97fa315356fffbdcd9876fe988c2">
   <xsd:schema xmlns:xsd="http://www.w3.org/2001/XMLSchema" xmlns:xs="http://www.w3.org/2001/XMLSchema" xmlns:p="http://schemas.microsoft.com/office/2006/metadata/properties" xmlns:ns2="71af3243-3dd4-4a8d-8c0d-dd76da1f02a5" xmlns:ns3="16c05727-aa75-4e4a-9b5f-8a80a1165891" targetNamespace="http://schemas.microsoft.com/office/2006/metadata/properties" ma:root="true" ma:fieldsID="14b8f0def80e6d70ce3def20c90759ae" ns2:_="" ns3:_="">
     <xsd:import namespace="71af3243-3dd4-4a8d-8c0d-dd76da1f02a5"/>
@@ -16747,25 +16749,25 @@
 </ct:contentTypeSchema>
 </file>
 
-<file path=customXml/item2.xml><?xml version="1.0" encoding="utf-8"?>
-<p:properties xmlns:p="http://schemas.microsoft.com/office/2006/metadata/properties" xmlns:xsi="http://www.w3.org/2001/XMLSchema-instance" xmlns:pc="http://schemas.microsoft.com/office/infopath/2007/PartnerControls">
-  <documentManagement>
-    <Status xmlns="71af3243-3dd4-4a8d-8c0d-dd76da1f02a5">Not started</Status>
-    <MediaServiceKeyPoints xmlns="71af3243-3dd4-4a8d-8c0d-dd76da1f02a5" xsi:nil="true"/>
-  </documentManagement>
-</p:properties>
+<file path=customXml/itemProps1.xml><?xml version="1.0" encoding="utf-8"?>
+<ds:datastoreItem xmlns:ds="http://schemas.openxmlformats.org/officeDocument/2006/customXml" ds:itemID="{05D99ABA-76CE-4A8E-B5F0-C051B96628DE}">
+  <ds:schemaRefs>
+    <ds:schemaRef ds:uri="http://schemas.microsoft.com/sharepoint/v3/contenttype/forms"/>
+  </ds:schemaRefs>
+</ds:datastoreItem>
 </file>
 
-<file path=customXml/item3.xml><?xml version="1.0" encoding="utf-8"?>
-<?mso-contentType ?>
-<FormTemplates xmlns="http://schemas.microsoft.com/sharepoint/v3/contenttype/forms">
-  <Display>DocumentLibraryForm</Display>
-  <Edit>DocumentLibraryForm</Edit>
-  <New>DocumentLibraryForm</New>
-</FormTemplates>
+<file path=customXml/itemProps2.xml><?xml version="1.0" encoding="utf-8"?>
+<ds:datastoreItem xmlns:ds="http://schemas.openxmlformats.org/officeDocument/2006/customXml" ds:itemID="{4DEA9014-ED64-4558-B1E1-D03F0EE32BEB}">
+  <ds:schemaRefs>
+    <ds:schemaRef ds:uri="http://schemas.microsoft.com/office/2006/metadata/properties"/>
+    <ds:schemaRef ds:uri="http://schemas.microsoft.com/office/infopath/2007/PartnerControls"/>
+    <ds:schemaRef ds:uri="71af3243-3dd4-4a8d-8c0d-dd76da1f02a5"/>
+  </ds:schemaRefs>
+</ds:datastoreItem>
 </file>
 
-<file path=customXml/itemProps1.xml><?xml version="1.0" encoding="utf-8"?>
+<file path=customXml/itemProps3.xml><?xml version="1.0" encoding="utf-8"?>
 <ds:datastoreItem xmlns:ds="http://schemas.openxmlformats.org/officeDocument/2006/customXml" ds:itemID="{B19EB750-A6DA-4BE8-B87B-FC499FE73360}">
   <ds:schemaRefs>
     <ds:schemaRef ds:uri="http://schemas.microsoft.com/office/2006/metadata/contentType"/>
@@ -16782,22 +16784,4 @@
     <ds:schemaRef ds:uri="http://schemas.microsoft.com/internal/obd"/>
   </ds:schemaRefs>
 </ds:datastoreItem>
-</file>
-
-<file path=customXml/itemProps2.xml><?xml version="1.0" encoding="utf-8"?>
-<ds:datastoreItem xmlns:ds="http://schemas.openxmlformats.org/officeDocument/2006/customXml" ds:itemID="{4DEA9014-ED64-4558-B1E1-D03F0EE32BEB}">
-  <ds:schemaRefs>
-    <ds:schemaRef ds:uri="http://schemas.microsoft.com/office/2006/metadata/properties"/>
-    <ds:schemaRef ds:uri="http://schemas.microsoft.com/office/infopath/2007/PartnerControls"/>
-    <ds:schemaRef ds:uri="71af3243-3dd4-4a8d-8c0d-dd76da1f02a5"/>
-  </ds:schemaRefs>
-</ds:datastoreItem>
-</file>
-
-<file path=customXml/itemProps3.xml><?xml version="1.0" encoding="utf-8"?>
-<ds:datastoreItem xmlns:ds="http://schemas.openxmlformats.org/officeDocument/2006/customXml" ds:itemID="{05D99ABA-76CE-4A8E-B5F0-C051B96628DE}">
-  <ds:schemaRefs>
-    <ds:schemaRef ds:uri="http://schemas.microsoft.com/sharepoint/v3/contenttype/forms"/>
-  </ds:schemaRefs>
-</ds:datastoreItem>
 </file>
--- a/Car_Data_Analysis.pptx
+++ b/Car_Data_Analysis.pptx
@@ -10038,8 +10038,8 @@
         </p:nvSpPr>
         <p:spPr>
           <a:xfrm>
-            <a:off x="6312871" y="4141999"/>
-            <a:ext cx="3400089" cy="861497"/>
+            <a:off x="4900631" y="4210269"/>
+            <a:ext cx="4294169" cy="861497"/>
           </a:xfrm>
         </p:spPr>
         <p:txBody>
@@ -10047,7 +10047,18 @@
           <a:lstStyle/>
           <a:p>
             <a:r>
-              <a:rPr sz="2200"/>
+              <a:rPr lang="en-IN" dirty="0">
+                <a:solidFill>
+                  <a:schemeClr val="tx1">
+                    <a:lumMod val="95000"/>
+                    <a:lumOff val="5000"/>
+                  </a:schemeClr>
+                </a:solidFill>
+              </a:rPr>
+              <a:t>NAME : </a:t>
+            </a:r>
+            <a:r>
+              <a:rPr sz="2200" dirty="0"/>
               <a:t>Parmanand Singh</a:t>
             </a:r>
           </a:p>
@@ -10071,8 +10082,8 @@
         </p:nvSpPr>
         <p:spPr>
           <a:xfrm>
-            <a:off x="6312871" y="2050553"/>
-            <a:ext cx="4998720" cy="743448"/>
+            <a:off x="4900631" y="3224916"/>
+            <a:ext cx="5533689" cy="408167"/>
           </a:xfrm>
         </p:spPr>
         <p:txBody>
@@ -10087,7 +10098,17 @@
             </a:r>
             <a:r>
               <a:rPr sz="2200" dirty="0"/>
-              <a:t> Car Data Analysis using Python</a:t>
+              <a:t> </a:t>
+            </a:r>
+            <a:r>
+              <a:rPr sz="2200" b="1" dirty="0">
+                <a:solidFill>
+                  <a:schemeClr val="accent5">
+                    <a:lumMod val="75000"/>
+                  </a:schemeClr>
+                </a:solidFill>
+              </a:rPr>
+              <a:t>Car Data Analysis using Python</a:t>
             </a:r>
           </a:p>
         </p:txBody>
@@ -10108,8 +10129,8 @@
         </p:nvSpPr>
         <p:spPr>
           <a:xfrm>
-            <a:off x="6400800" y="2794001"/>
-            <a:ext cx="3312160" cy="861497"/>
+            <a:off x="4900631" y="3763060"/>
+            <a:ext cx="6431280" cy="861497"/>
           </a:xfrm>
           <a:prstGeom prst="rect">
             <a:avLst/>
@@ -10344,7 +10365,22 @@
             </a:lvl9pPr>
           </a:lstStyle>
           <a:p>
-            <a:endParaRPr/>
+            <a:r>
+              <a:rPr lang="en-IN" dirty="0">
+                <a:solidFill>
+                  <a:schemeClr val="tx1">
+                    <a:lumMod val="95000"/>
+                    <a:lumOff val="5000"/>
+                  </a:schemeClr>
+                </a:solidFill>
+              </a:rPr>
+              <a:t>AICTE STU ID :</a:t>
+            </a:r>
+            <a:r>
+              <a:rPr lang="en-IN" dirty="0"/>
+              <a:t>STU684037216b0e91749038881</a:t>
+            </a:r>
+            <a:endParaRPr dirty="0"/>
           </a:p>
         </p:txBody>
       </p:sp>
@@ -10704,15 +10740,10 @@
                             </p:stCondLst>
                             <p:childTnLst>
                               <p:par>
-                                <p:cTn id="23" presetID="53" presetClass="entr" presetSubtype="16" fill="hold" grpId="0" nodeType="clickEffect" nodePh="1">
+                                <p:cTn id="23" presetID="53" presetClass="entr" presetSubtype="16" fill="hold" grpId="0" nodeType="clickEffect">
                                   <p:stCondLst>
                                     <p:cond delay="0"/>
                                   </p:stCondLst>
-                                  <p:endCondLst>
-                                    <p:cond evt="begin" delay="0">
-                                      <p:tn val="23"/>
-                                    </p:cond>
-                                  </p:endCondLst>
                                   <p:childTnLst>
                                     <p:set>
                                       <p:cBhvr>
@@ -16511,24 +16542,6 @@
 </file>
 
 <file path=customXml/item1.xml><?xml version="1.0" encoding="utf-8"?>
-<?mso-contentType ?>
-<FormTemplates xmlns="http://schemas.microsoft.com/sharepoint/v3/contenttype/forms">
-  <Display>DocumentLibraryForm</Display>
-  <Edit>DocumentLibraryForm</Edit>
-  <New>DocumentLibraryForm</New>
-</FormTemplates>
-</file>
-
-<file path=customXml/item2.xml><?xml version="1.0" encoding="utf-8"?>
-<p:properties xmlns:p="http://schemas.microsoft.com/office/2006/metadata/properties" xmlns:xsi="http://www.w3.org/2001/XMLSchema-instance" xmlns:pc="http://schemas.microsoft.com/office/infopath/2007/PartnerControls">
-  <documentManagement>
-    <Status xmlns="71af3243-3dd4-4a8d-8c0d-dd76da1f02a5">Not started</Status>
-    <MediaServiceKeyPoints xmlns="71af3243-3dd4-4a8d-8c0d-dd76da1f02a5" xsi:nil="true"/>
-  </documentManagement>
-</p:properties>
-</file>
-
-<file path=customXml/item3.xml><?xml version="1.0" encoding="utf-8"?>
 <ct:contentTypeSchema xmlns:ct="http://schemas.microsoft.com/office/2006/metadata/contentType" xmlns:ma="http://schemas.microsoft.com/office/2006/metadata/properties/metaAttributes" ct:_="" ma:_="" ma:contentTypeName="Document" ma:contentTypeID="0x01010079F111ED35F8CC479449609E8A0923A6" ma:contentTypeVersion="12" ma:contentTypeDescription="Create a new document." ma:contentTypeScope="" ma:versionID="426e97fa315356fffbdcd9876fe988c2">
   <xsd:schema xmlns:xsd="http://www.w3.org/2001/XMLSchema" xmlns:xs="http://www.w3.org/2001/XMLSchema" xmlns:p="http://schemas.microsoft.com/office/2006/metadata/properties" xmlns:ns2="71af3243-3dd4-4a8d-8c0d-dd76da1f02a5" xmlns:ns3="16c05727-aa75-4e4a-9b5f-8a80a1165891" targetNamespace="http://schemas.microsoft.com/office/2006/metadata/properties" ma:root="true" ma:fieldsID="14b8f0def80e6d70ce3def20c90759ae" ns2:_="" ns3:_="">
     <xsd:import namespace="71af3243-3dd4-4a8d-8c0d-dd76da1f02a5"/>
@@ -16749,25 +16762,25 @@
 </ct:contentTypeSchema>
 </file>
 
-<file path=customXml/itemProps1.xml><?xml version="1.0" encoding="utf-8"?>
-<ds:datastoreItem xmlns:ds="http://schemas.openxmlformats.org/officeDocument/2006/customXml" ds:itemID="{05D99ABA-76CE-4A8E-B5F0-C051B96628DE}">
-  <ds:schemaRefs>
-    <ds:schemaRef ds:uri="http://schemas.microsoft.com/sharepoint/v3/contenttype/forms"/>
-  </ds:schemaRefs>
-</ds:datastoreItem>
+<file path=customXml/item2.xml><?xml version="1.0" encoding="utf-8"?>
+<p:properties xmlns:p="http://schemas.microsoft.com/office/2006/metadata/properties" xmlns:xsi="http://www.w3.org/2001/XMLSchema-instance" xmlns:pc="http://schemas.microsoft.com/office/infopath/2007/PartnerControls">
+  <documentManagement>
+    <Status xmlns="71af3243-3dd4-4a8d-8c0d-dd76da1f02a5">Not started</Status>
+    <MediaServiceKeyPoints xmlns="71af3243-3dd4-4a8d-8c0d-dd76da1f02a5" xsi:nil="true"/>
+  </documentManagement>
+</p:properties>
 </file>
 
-<file path=customXml/itemProps2.xml><?xml version="1.0" encoding="utf-8"?>
-<ds:datastoreItem xmlns:ds="http://schemas.openxmlformats.org/officeDocument/2006/customXml" ds:itemID="{4DEA9014-ED64-4558-B1E1-D03F0EE32BEB}">
-  <ds:schemaRefs>
-    <ds:schemaRef ds:uri="http://schemas.microsoft.com/office/2006/metadata/properties"/>
-    <ds:schemaRef ds:uri="http://schemas.microsoft.com/office/infopath/2007/PartnerControls"/>
-    <ds:schemaRef ds:uri="71af3243-3dd4-4a8d-8c0d-dd76da1f02a5"/>
-  </ds:schemaRefs>
-</ds:datastoreItem>
+<file path=customXml/item3.xml><?xml version="1.0" encoding="utf-8"?>
+<?mso-contentType ?>
+<FormTemplates xmlns="http://schemas.microsoft.com/sharepoint/v3/contenttype/forms">
+  <Display>DocumentLibraryForm</Display>
+  <Edit>DocumentLibraryForm</Edit>
+  <New>DocumentLibraryForm</New>
+</FormTemplates>
 </file>
 
-<file path=customXml/itemProps3.xml><?xml version="1.0" encoding="utf-8"?>
+<file path=customXml/itemProps1.xml><?xml version="1.0" encoding="utf-8"?>
 <ds:datastoreItem xmlns:ds="http://schemas.openxmlformats.org/officeDocument/2006/customXml" ds:itemID="{B19EB750-A6DA-4BE8-B87B-FC499FE73360}">
   <ds:schemaRefs>
     <ds:schemaRef ds:uri="http://schemas.microsoft.com/office/2006/metadata/contentType"/>
@@ -16784,4 +16797,22 @@
     <ds:schemaRef ds:uri="http://schemas.microsoft.com/internal/obd"/>
   </ds:schemaRefs>
 </ds:datastoreItem>
+</file>
+
+<file path=customXml/itemProps2.xml><?xml version="1.0" encoding="utf-8"?>
+<ds:datastoreItem xmlns:ds="http://schemas.openxmlformats.org/officeDocument/2006/customXml" ds:itemID="{4DEA9014-ED64-4558-B1E1-D03F0EE32BEB}">
+  <ds:schemaRefs>
+    <ds:schemaRef ds:uri="http://schemas.microsoft.com/office/2006/metadata/properties"/>
+    <ds:schemaRef ds:uri="http://schemas.microsoft.com/office/infopath/2007/PartnerControls"/>
+    <ds:schemaRef ds:uri="71af3243-3dd4-4a8d-8c0d-dd76da1f02a5"/>
+  </ds:schemaRefs>
+</ds:datastoreItem>
+</file>
+
+<file path=customXml/itemProps3.xml><?xml version="1.0" encoding="utf-8"?>
+<ds:datastoreItem xmlns:ds="http://schemas.openxmlformats.org/officeDocument/2006/customXml" ds:itemID="{05D99ABA-76CE-4A8E-B5F0-C051B96628DE}">
+  <ds:schemaRefs>
+    <ds:schemaRef ds:uri="http://schemas.microsoft.com/sharepoint/v3/contenttype/forms"/>
+  </ds:schemaRefs>
+</ds:datastoreItem>
 </file>